--- a/recycle/POWERPOINT/簡報1.pptx
+++ b/recycle/POWERPOINT/簡報1.pptx
@@ -3402,7 +3402,7 @@
         </p:blipFill>
         <p:spPr>
           <a:xfrm>
-            <a:off x="-204000" y="-6249114"/>
+            <a:off x="-140931" y="-6249114"/>
             <a:ext cx="12600000" cy="18900000"/>
           </a:xfrm>
           <a:prstGeom prst="rect">
@@ -3427,8 +3427,8 @@
         </p:nvSpPr>
         <p:spPr>
           <a:xfrm>
-            <a:off x="557214" y="1985955"/>
-            <a:ext cx="11501436" cy="600075"/>
+            <a:off x="68580" y="1985955"/>
+            <a:ext cx="11990070" cy="600075"/>
           </a:xfrm>
           <a:prstGeom prst="stripedRightArrow">
             <a:avLst/>
@@ -3504,8 +3504,8 @@
         </p:nvSpPr>
         <p:spPr>
           <a:xfrm>
-            <a:off x="557214" y="2586030"/>
-            <a:ext cx="1984280" cy="2308324"/>
+            <a:off x="-58989" y="2586030"/>
+            <a:ext cx="2662518" cy="1477328"/>
           </a:xfrm>
           <a:prstGeom prst="rect">
             <a:avLst/>
@@ -3529,6 +3529,8 @@
               </a:rPr>
               <a:t>2021</a:t>
             </a:r>
+          </a:p>
+          <a:p>
             <a:br>
               <a:rPr lang="en-US" altLang="zh-TW" dirty="0">
                 <a:solidFill>
@@ -3567,7 +3569,6 @@
             </a:endParaRPr>
           </a:p>
           <a:p>
-            <a:pPr algn="ctr"/>
             <a:r>
               <a:rPr lang="zh-TW" altLang="en-US" dirty="0">
                 <a:solidFill>
@@ -3582,11 +3583,8 @@
                   <a:schemeClr val="bg1"/>
                 </a:solidFill>
               </a:rPr>
-              <a:t>Universal Unity VR</a:t>
-            </a:r>
-          </a:p>
-          <a:p>
-            <a:pPr algn="ctr"/>
+              <a:t>Unity VR</a:t>
+            </a:r>
             <a:r>
               <a:rPr lang="zh-TW" altLang="en-US" dirty="0">
                 <a:solidFill>
@@ -3635,7 +3633,7 @@
               </a:rPr>
               <a:t>Tinkercad</a:t>
             </a:r>
-            <a:endParaRPr lang="zh-TW" altLang="en-US" dirty="0">
+            <a:endParaRPr lang="en-US" altLang="zh-TW" dirty="0">
               <a:solidFill>
                 <a:schemeClr val="bg1"/>
               </a:solidFill>
@@ -3743,7 +3741,7 @@
                   <a:schemeClr val="bg1"/>
                 </a:solidFill>
               </a:rPr>
-              <a:t>「氣象站」</a:t>
+              <a:t>氣象站</a:t>
             </a:r>
             <a:endParaRPr lang="en-US" altLang="zh-TW" dirty="0">
               <a:solidFill>
@@ -3799,7 +3797,7 @@
                   <a:schemeClr val="bg1"/>
                 </a:solidFill>
               </a:rPr>
-              <a:t>設計下一代互動式作品</a:t>
+              <a:t>構思下一代互動式作品</a:t>
             </a:r>
             <a:endParaRPr lang="en-US" altLang="zh-TW" dirty="0">
               <a:solidFill>
@@ -3824,7 +3822,7 @@
         <p:spPr>
           <a:xfrm>
             <a:off x="8771966" y="2586030"/>
-            <a:ext cx="2662518" cy="1477328"/>
+            <a:ext cx="2662518" cy="2031325"/>
           </a:xfrm>
           <a:prstGeom prst="rect">
             <a:avLst/>
@@ -3848,16 +3846,29 @@
               </a:rPr>
               <a:t>The future</a:t>
             </a:r>
+            <a:endParaRPr lang="en-US" altLang="zh-TW" dirty="0">
+              <a:solidFill>
+                <a:schemeClr val="bg1"/>
+              </a:solidFill>
+            </a:endParaRPr>
           </a:p>
           <a:p>
             <a:pPr algn="ctr"/>
             <a:r>
+              <a:rPr lang="zh-TW" altLang="en-US" dirty="0">
+                <a:solidFill>
+                  <a:schemeClr val="bg1"/>
+                </a:solidFill>
+              </a:rPr>
+              <a:t>應用 </a:t>
+            </a:r>
+            <a:r>
               <a:rPr lang="en-US" altLang="zh-TW" dirty="0">
                 <a:solidFill>
                   <a:schemeClr val="bg1"/>
                 </a:solidFill>
               </a:rPr>
-              <a:t>YOLO</a:t>
+              <a:t>YOLO </a:t>
             </a:r>
             <a:r>
               <a:rPr lang="zh-TW" altLang="en-US" dirty="0">
@@ -3865,45 +3876,95 @@
                   <a:schemeClr val="bg1"/>
                 </a:solidFill>
               </a:rPr>
+              <a:t>於現場</a:t>
+            </a:r>
+            <a:endParaRPr lang="en-US" altLang="zh-TW" dirty="0">
+              <a:solidFill>
+                <a:schemeClr val="bg1"/>
+              </a:solidFill>
+            </a:endParaRPr>
+          </a:p>
+          <a:p>
+            <a:pPr algn="ctr"/>
+            <a:r>
+              <a:rPr lang="zh-TW" altLang="en-US" dirty="0">
+                <a:solidFill>
+                  <a:schemeClr val="bg1"/>
+                </a:solidFill>
+              </a:rPr>
+              <a:t>物件辨識</a:t>
+            </a:r>
+            <a:endParaRPr lang="en-US" altLang="zh-TW" dirty="0">
+              <a:solidFill>
+                <a:schemeClr val="bg1"/>
+              </a:solidFill>
+            </a:endParaRPr>
+          </a:p>
+          <a:p>
+            <a:pPr algn="ctr"/>
+            <a:r>
+              <a:rPr lang="zh-TW" altLang="en-US" dirty="0">
+                <a:solidFill>
+                  <a:schemeClr val="bg1"/>
+                </a:solidFill>
+              </a:rPr>
+              <a:t>開發 </a:t>
+            </a:r>
+            <a:r>
+              <a:rPr lang="en-US" altLang="zh-TW" dirty="0">
+                <a:solidFill>
+                  <a:schemeClr val="bg1"/>
+                </a:solidFill>
+              </a:rPr>
+              <a:t>n8n </a:t>
+            </a:r>
+            <a:r>
+              <a:rPr lang="zh-TW" altLang="en-US" dirty="0">
+                <a:solidFill>
+                  <a:schemeClr val="bg1"/>
+                </a:solidFill>
+              </a:rPr>
+              <a:t>自動化</a:t>
+            </a:r>
+            <a:endParaRPr lang="en-US" altLang="zh-TW">
+              <a:solidFill>
+                <a:schemeClr val="bg1"/>
+              </a:solidFill>
+            </a:endParaRPr>
+          </a:p>
+          <a:p>
+            <a:pPr algn="ctr"/>
+            <a:r>
+              <a:rPr lang="zh-TW" altLang="en-US">
+                <a:solidFill>
+                  <a:schemeClr val="bg1"/>
+                </a:solidFill>
+              </a:rPr>
+              <a:t>流程</a:t>
+            </a:r>
+            <a:r>
+              <a:rPr lang="zh-TW" altLang="en-US" dirty="0">
+                <a:solidFill>
+                  <a:schemeClr val="bg1"/>
+                </a:solidFill>
+              </a:rPr>
               <a:t>應用</a:t>
             </a:r>
-            <a:br>
-              <a:rPr lang="en-US" altLang="zh-TW" dirty="0">
-                <a:solidFill>
-                  <a:schemeClr val="bg1"/>
-                </a:solidFill>
-              </a:rPr>
-            </a:br>
-            <a:r>
-              <a:rPr lang="en-US" altLang="zh-TW" dirty="0">
-                <a:solidFill>
-                  <a:schemeClr val="bg1"/>
-                </a:solidFill>
-              </a:rPr>
-              <a:t>N8N</a:t>
-            </a:r>
+            <a:endParaRPr lang="en-US" altLang="zh-TW" dirty="0">
+              <a:solidFill>
+                <a:schemeClr val="bg1"/>
+              </a:solidFill>
+            </a:endParaRPr>
+          </a:p>
+          <a:p>
+            <a:pPr algn="ctr"/>
             <a:r>
               <a:rPr lang="zh-TW" altLang="en-US" dirty="0">
                 <a:solidFill>
                   <a:schemeClr val="bg1"/>
                 </a:solidFill>
               </a:rPr>
-              <a:t>應用</a:t>
-            </a:r>
-            <a:br>
-              <a:rPr lang="en-US" altLang="zh-TW" dirty="0">
-                <a:solidFill>
-                  <a:schemeClr val="bg1"/>
-                </a:solidFill>
-              </a:rPr>
-            </a:br>
-            <a:r>
-              <a:rPr lang="zh-TW" altLang="en-US" dirty="0">
-                <a:solidFill>
-                  <a:schemeClr val="bg1"/>
-                </a:solidFill>
-              </a:rPr>
-              <a:t>一體機及智能倉庫管理系統</a:t>
+              <a:t>規劃一體機與智能倉庫管理系統</a:t>
             </a:r>
             <a:endParaRPr lang="en-US" altLang="zh-TW" dirty="0">
               <a:solidFill>
@@ -3981,7 +4042,7 @@
                   <a:schemeClr val="bg1"/>
                 </a:solidFill>
               </a:rPr>
-              <a:t> 、太陽能超級電容充電板、溫溼度名片卡</a:t>
+              <a:t> 太陽能超級電容充電板、溫溼度名片卡</a:t>
             </a:r>
             <a:endParaRPr lang="en-US" altLang="zh-TW" dirty="0">
               <a:solidFill>
@@ -3997,7 +4058,7 @@
                   <a:schemeClr val="bg1"/>
                 </a:solidFill>
               </a:rPr>
-              <a:t>設計下一代檢測器</a:t>
+              <a:t>進一步開發檢測器模組</a:t>
             </a:r>
             <a:endParaRPr lang="en-US" altLang="zh-TW" dirty="0">
               <a:solidFill>
@@ -4129,7 +4190,7 @@
                   <a:schemeClr val="bg1"/>
                 </a:solidFill>
               </a:rPr>
-              <a:t>設計下一代檢測器</a:t>
+              <a:t>持續設計次世代檢測器</a:t>
             </a:r>
             <a:endParaRPr lang="en-US" altLang="zh-TW" dirty="0">
               <a:solidFill>
@@ -4347,7 +4408,7 @@
         </p:blipFill>
         <p:spPr>
           <a:xfrm>
-            <a:off x="2784903" y="2586030"/>
+            <a:off x="2898683" y="2586030"/>
             <a:ext cx="914400" cy="914400"/>
           </a:xfrm>
           <a:prstGeom prst="rect">
@@ -4383,7 +4444,7 @@
         </p:blipFill>
         <p:spPr>
           <a:xfrm>
-            <a:off x="2784903" y="3774381"/>
+            <a:off x="2898683" y="3606158"/>
             <a:ext cx="914400" cy="914400"/>
           </a:xfrm>
           <a:prstGeom prst="rect">
